--- a/sayt/media/resources/2026/10/mehnat-muhofazasi-05-mavzu.pptx
+++ b/sayt/media/resources/2026/10/mehnat-muhofazasi-05-mavzu.pptx
@@ -8612,11 +8612,11 @@
         <p:spPr>
           <a:xfrm>
             <a:off x="731520" y="1645158"/>
-            <a:ext cx="5204307" cy="1310894"/>
+            <a:ext cx="10728655" cy="2080641"/>
           </a:xfrm>
           <a:prstGeom prst="roundRect">
             <a:avLst>
-              <a:gd name="adj" fmla="val 5580"/>
+              <a:gd name="adj" fmla="val 3515"/>
             </a:avLst>
           </a:prstGeom>
           <a:solidFill>
@@ -8660,7 +8660,7 @@
         <p:spPr>
           <a:xfrm>
             <a:off x="731520" y="1645158"/>
-            <a:ext cx="73152" cy="1310894"/>
+            <a:ext cx="73152" cy="2080641"/>
           </a:xfrm>
           <a:prstGeom prst="rect">
             <a:avLst/>
@@ -8704,367 +8704,7 @@
         <p:spPr>
           <a:xfrm>
             <a:off x="1005840" y="1809750"/>
-            <a:ext cx="4936991" cy="352424"/>
-          </a:xfrm>
-          <a:prstGeom prst="rect">
-            <a:avLst/>
-          </a:prstGeom>
-          <a:noFill/>
-        </p:spPr>
-        <p:txBody>
-          <a:bodyPr wrap="square" lIns="0" rIns="0" tIns="0" bIns="0" anchor="t">
-            <a:spAutoFit/>
-          </a:bodyPr>
-          <a:lstStyle/>
-          <a:p>
-            <a:pPr algn="l">
-              <a:lnSpc>
-                <a:spcPts val="2415"/>
-              </a:lnSpc>
-            </a:pPr>
-            <a:r>
-              <a:rPr sz="2100" b="1">
-                <a:solidFill>
-                  <a:srgbClr val="1B2A4A"/>
-                </a:solidFill>
-                <a:latin typeface="Georgia"/>
-              </a:rPr>
-              <a:t>Bel</a:t>
-            </a:r>
-          </a:p>
-        </p:txBody>
-      </p:sp>
-      <p:sp>
-        <p:nvSpPr>
-          <p:cNvPr id="40" name="TextBox 39"/>
-          <p:cNvSpPr txBox="1"/>
-          <p:nvPr/>
-        </p:nvSpPr>
-        <p:spPr>
-          <a:xfrm>
-            <a:off x="1005840" y="2207895"/>
-            <a:ext cx="4936991" cy="640080"/>
-          </a:xfrm>
-          <a:prstGeom prst="rect">
-            <a:avLst/>
-          </a:prstGeom>
-          <a:noFill/>
-        </p:spPr>
-        <p:txBody>
-          <a:bodyPr wrap="square" lIns="0" rIns="0" tIns="0" bIns="0" anchor="t">
-            <a:spAutoFit/>
-          </a:bodyPr>
-          <a:lstStyle/>
-          <a:p>
-            <a:pPr algn="l">
-              <a:lnSpc>
-                <a:spcPts val="2340"/>
-              </a:lnSpc>
-            </a:pPr>
-            <a:r>
-              <a:rPr sz="1800" b="0">
-                <a:solidFill>
-                  <a:srgbClr val="3A4560"/>
-                </a:solidFill>
-                <a:latin typeface="Segoe UI"/>
-              </a:rPr>
-              <a:t>Stul suyanchig‘iga tayanadi, umurtqa tabiiy</a:t>
-            </a:r>
-            <a:br/>
-            <a:r>
-              <a:rPr sz="1800" b="0">
-                <a:solidFill>
-                  <a:srgbClr val="3A4560"/>
-                </a:solidFill>
-                <a:latin typeface="Segoe UI"/>
-              </a:rPr>
-              <a:t>holatda tik ushlanadi.</a:t>
-            </a:r>
-          </a:p>
-        </p:txBody>
-      </p:sp>
-      <p:sp>
-        <p:nvSpPr>
-          <p:cNvPr id="41" name="Rounded Rectangle 40"/>
-          <p:cNvSpPr/>
-          <p:nvPr/>
-        </p:nvSpPr>
-        <p:spPr>
-          <a:xfrm>
-            <a:off x="6255867" y="1645158"/>
-            <a:ext cx="5204307" cy="1310894"/>
-          </a:xfrm>
-          <a:prstGeom prst="roundRect">
-            <a:avLst>
-              <a:gd name="adj" fmla="val 5580"/>
-            </a:avLst>
-          </a:prstGeom>
-          <a:solidFill>
-            <a:srgbClr val="FBF6EC"/>
-          </a:solidFill>
-          <a:ln w="12700">
-            <a:solidFill>
-              <a:srgbClr val="D8C8AE"/>
-            </a:solidFill>
-          </a:ln>
-          <a:effectLst/>
-        </p:spPr>
-        <p:style>
-          <a:lnRef idx="1">
-            <a:schemeClr val="accent1"/>
-          </a:lnRef>
-          <a:fillRef idx="3">
-            <a:schemeClr val="accent1"/>
-          </a:fillRef>
-          <a:effectRef idx="2">
-            <a:schemeClr val="accent1"/>
-          </a:effectRef>
-          <a:fontRef idx="minor">
-            <a:schemeClr val="lt1"/>
-          </a:fontRef>
-        </p:style>
-        <p:txBody>
-          <a:bodyPr rtlCol="0" anchor="ctr"/>
-          <a:lstStyle/>
-          <a:p>
-            <a:pPr algn="ctr"/>
-          </a:p>
-        </p:txBody>
-      </p:sp>
-      <p:sp>
-        <p:nvSpPr>
-          <p:cNvPr id="42" name="Rectangle 41"/>
-          <p:cNvSpPr/>
-          <p:nvPr/>
-        </p:nvSpPr>
-        <p:spPr>
-          <a:xfrm>
-            <a:off x="6255867" y="1645158"/>
-            <a:ext cx="73152" cy="1310894"/>
-          </a:xfrm>
-          <a:prstGeom prst="rect">
-            <a:avLst/>
-          </a:prstGeom>
-          <a:solidFill>
-            <a:srgbClr val="0E7C7B"/>
-          </a:solidFill>
-          <a:ln>
-            <a:noFill/>
-          </a:ln>
-          <a:effectLst/>
-        </p:spPr>
-        <p:style>
-          <a:lnRef idx="1">
-            <a:schemeClr val="accent1"/>
-          </a:lnRef>
-          <a:fillRef idx="3">
-            <a:schemeClr val="accent1"/>
-          </a:fillRef>
-          <a:effectRef idx="2">
-            <a:schemeClr val="accent1"/>
-          </a:effectRef>
-          <a:fontRef idx="minor">
-            <a:schemeClr val="lt1"/>
-          </a:fontRef>
-        </p:style>
-        <p:txBody>
-          <a:bodyPr rtlCol="0" anchor="ctr"/>
-          <a:lstStyle/>
-          <a:p>
-            <a:pPr algn="ctr"/>
-          </a:p>
-        </p:txBody>
-      </p:sp>
-      <p:sp>
-        <p:nvSpPr>
-          <p:cNvPr id="43" name="TextBox 42"/>
-          <p:cNvSpPr txBox="1"/>
-          <p:nvPr/>
-        </p:nvSpPr>
-        <p:spPr>
-          <a:xfrm>
-            <a:off x="6530187" y="1809750"/>
-            <a:ext cx="4936991" cy="294004"/>
-          </a:xfrm>
-          <a:prstGeom prst="rect">
-            <a:avLst/>
-          </a:prstGeom>
-          <a:noFill/>
-        </p:spPr>
-        <p:txBody>
-          <a:bodyPr wrap="square" lIns="0" rIns="0" tIns="0" bIns="0" anchor="t">
-            <a:spAutoFit/>
-          </a:bodyPr>
-          <a:lstStyle/>
-          <a:p>
-            <a:pPr algn="l">
-              <a:lnSpc>
-                <a:spcPts val="1954"/>
-              </a:lnSpc>
-            </a:pPr>
-            <a:r>
-              <a:rPr sz="1700" b="1">
-                <a:solidFill>
-                  <a:srgbClr val="1B2A4A"/>
-                </a:solidFill>
-                <a:latin typeface="Georgia"/>
-              </a:rPr>
-              <a:t>Bilaklar</a:t>
-            </a:r>
-          </a:p>
-        </p:txBody>
-      </p:sp>
-      <p:sp>
-        <p:nvSpPr>
-          <p:cNvPr id="44" name="TextBox 43"/>
-          <p:cNvSpPr txBox="1"/>
-          <p:nvPr/>
-        </p:nvSpPr>
-        <p:spPr>
-          <a:xfrm>
-            <a:off x="6530187" y="2149475"/>
-            <a:ext cx="4936991" cy="508000"/>
-          </a:xfrm>
-          <a:prstGeom prst="rect">
-            <a:avLst/>
-          </a:prstGeom>
-          <a:noFill/>
-        </p:spPr>
-        <p:txBody>
-          <a:bodyPr wrap="square" lIns="0" rIns="0" tIns="0" bIns="0" anchor="t">
-            <a:spAutoFit/>
-          </a:bodyPr>
-          <a:lstStyle/>
-          <a:p>
-            <a:pPr algn="l">
-              <a:lnSpc>
-                <a:spcPts val="1820"/>
-              </a:lnSpc>
-            </a:pPr>
-            <a:r>
-              <a:rPr sz="1400" b="0">
-                <a:solidFill>
-                  <a:srgbClr val="3A4560"/>
-                </a:solidFill>
-                <a:latin typeface="Segoe UI"/>
-              </a:rPr>
-              <a:t>Klaviatura va sichqoncha bilan ishlaganda to‘g‘ri chiziqda</a:t>
-            </a:r>
-            <a:br/>
-            <a:r>
-              <a:rPr sz="1400" b="0">
-                <a:solidFill>
-                  <a:srgbClr val="3A4560"/>
-                </a:solidFill>
-                <a:latin typeface="Segoe UI"/>
-              </a:rPr>
-              <a:t>bo‘ladi, yuqoriga yoki yon tomonga bukilmaydi.</a:t>
-            </a:r>
-          </a:p>
-        </p:txBody>
-      </p:sp>
-      <p:sp>
-        <p:nvSpPr>
-          <p:cNvPr id="45" name="Rounded Rectangle 44"/>
-          <p:cNvSpPr/>
-          <p:nvPr/>
-        </p:nvSpPr>
-        <p:spPr>
-          <a:xfrm>
-            <a:off x="731520" y="3184652"/>
-            <a:ext cx="5204307" cy="1310894"/>
-          </a:xfrm>
-          <a:prstGeom prst="roundRect">
-            <a:avLst>
-              <a:gd name="adj" fmla="val 5580"/>
-            </a:avLst>
-          </a:prstGeom>
-          <a:solidFill>
-            <a:srgbClr val="FBF6EC"/>
-          </a:solidFill>
-          <a:ln w="12700">
-            <a:solidFill>
-              <a:srgbClr val="D8C8AE"/>
-            </a:solidFill>
-          </a:ln>
-          <a:effectLst/>
-        </p:spPr>
-        <p:style>
-          <a:lnRef idx="1">
-            <a:schemeClr val="accent1"/>
-          </a:lnRef>
-          <a:fillRef idx="3">
-            <a:schemeClr val="accent1"/>
-          </a:fillRef>
-          <a:effectRef idx="2">
-            <a:schemeClr val="accent1"/>
-          </a:effectRef>
-          <a:fontRef idx="minor">
-            <a:schemeClr val="lt1"/>
-          </a:fontRef>
-        </p:style>
-        <p:txBody>
-          <a:bodyPr rtlCol="0" anchor="ctr"/>
-          <a:lstStyle/>
-          <a:p>
-            <a:pPr algn="ctr"/>
-          </a:p>
-        </p:txBody>
-      </p:sp>
-      <p:sp>
-        <p:nvSpPr>
-          <p:cNvPr id="46" name="Rectangle 45"/>
-          <p:cNvSpPr/>
-          <p:nvPr/>
-        </p:nvSpPr>
-        <p:spPr>
-          <a:xfrm>
-            <a:off x="731520" y="3184652"/>
-            <a:ext cx="73152" cy="1310894"/>
-          </a:xfrm>
-          <a:prstGeom prst="rect">
-            <a:avLst/>
-          </a:prstGeom>
-          <a:solidFill>
-            <a:srgbClr val="0E7C7B"/>
-          </a:solidFill>
-          <a:ln>
-            <a:noFill/>
-          </a:ln>
-          <a:effectLst/>
-        </p:spPr>
-        <p:style>
-          <a:lnRef idx="1">
-            <a:schemeClr val="accent1"/>
-          </a:lnRef>
-          <a:fillRef idx="3">
-            <a:schemeClr val="accent1"/>
-          </a:fillRef>
-          <a:effectRef idx="2">
-            <a:schemeClr val="accent1"/>
-          </a:effectRef>
-          <a:fontRef idx="minor">
-            <a:schemeClr val="lt1"/>
-          </a:fontRef>
-        </p:style>
-        <p:txBody>
-          <a:bodyPr rtlCol="0" anchor="ctr"/>
-          <a:lstStyle/>
-          <a:p>
-            <a:pPr algn="ctr"/>
-          </a:p>
-        </p:txBody>
-      </p:sp>
-      <p:sp>
-        <p:nvSpPr>
-          <p:cNvPr id="47" name="TextBox 46"/>
-          <p:cNvSpPr txBox="1"/>
-          <p:nvPr/>
-        </p:nvSpPr>
-        <p:spPr>
-          <a:xfrm>
-            <a:off x="1005840" y="3349244"/>
-            <a:ext cx="4936991" cy="367029"/>
+            <a:ext cx="10682313" cy="367029"/>
           </a:xfrm>
           <a:prstGeom prst="rect">
             <a:avLst/>
@@ -9089,21 +8729,21 @@
                 </a:solidFill>
                 <a:latin typeface="Georgia"/>
               </a:rPr>
-              <a:t>Bosh va bo‘yin</a:t>
+              <a:t>Ergonomika</a:t>
             </a:r>
           </a:p>
         </p:txBody>
       </p:sp>
       <p:sp>
         <p:nvSpPr>
-          <p:cNvPr id="48" name="TextBox 47"/>
+          <p:cNvPr id="40" name="TextBox 39"/>
           <p:cNvSpPr txBox="1"/>
           <p:nvPr/>
         </p:nvSpPr>
         <p:spPr>
           <a:xfrm>
-            <a:off x="1005840" y="3761994"/>
-            <a:ext cx="4936991" cy="359410"/>
+            <a:off x="1005840" y="2222500"/>
+            <a:ext cx="10682313" cy="673100"/>
           </a:xfrm>
           <a:prstGeom prst="rect">
             <a:avLst/>
@@ -9128,205 +8768,35 @@
                 </a:solidFill>
                 <a:latin typeface="Segoe UI"/>
               </a:rPr>
-              <a:t>To‘g‘ri, nigoh ekranga biroz pastga qaragan.</a:t>
+              <a:t>Ish joyi, jihoz va ish jarayonini inson tanasining anatomik va fiziologik imkoniyatlariga</a:t>
             </a:r>
-          </a:p>
-        </p:txBody>
-      </p:sp>
-      <p:sp>
-        <p:nvSpPr>
-          <p:cNvPr id="49" name="Rounded Rectangle 48"/>
-          <p:cNvSpPr/>
-          <p:nvPr/>
-        </p:nvSpPr>
-        <p:spPr>
-          <a:xfrm>
-            <a:off x="6255867" y="3184652"/>
-            <a:ext cx="5204307" cy="1310894"/>
-          </a:xfrm>
-          <a:prstGeom prst="roundRect">
-            <a:avLst>
-              <a:gd name="adj" fmla="val 5580"/>
-            </a:avLst>
-          </a:prstGeom>
-          <a:solidFill>
-            <a:srgbClr val="FBF6EC"/>
-          </a:solidFill>
-          <a:ln w="12700">
-            <a:solidFill>
-              <a:srgbClr val="D8C8AE"/>
-            </a:solidFill>
-          </a:ln>
-          <a:effectLst/>
-        </p:spPr>
-        <p:style>
-          <a:lnRef idx="1">
-            <a:schemeClr val="accent1"/>
-          </a:lnRef>
-          <a:fillRef idx="3">
-            <a:schemeClr val="accent1"/>
-          </a:fillRef>
-          <a:effectRef idx="2">
-            <a:schemeClr val="accent1"/>
-          </a:effectRef>
-          <a:fontRef idx="minor">
-            <a:schemeClr val="lt1"/>
-          </a:fontRef>
-        </p:style>
-        <p:txBody>
-          <a:bodyPr rtlCol="0" anchor="ctr"/>
-          <a:lstStyle/>
-          <a:p>
-            <a:pPr algn="ctr"/>
-          </a:p>
-        </p:txBody>
-      </p:sp>
-      <p:sp>
-        <p:nvSpPr>
-          <p:cNvPr id="50" name="Rectangle 49"/>
-          <p:cNvSpPr/>
-          <p:nvPr/>
-        </p:nvSpPr>
-        <p:spPr>
-          <a:xfrm>
-            <a:off x="6255867" y="3184652"/>
-            <a:ext cx="73152" cy="1310894"/>
-          </a:xfrm>
-          <a:prstGeom prst="rect">
-            <a:avLst/>
-          </a:prstGeom>
-          <a:solidFill>
-            <a:srgbClr val="0E7C7B"/>
-          </a:solidFill>
-          <a:ln>
-            <a:noFill/>
-          </a:ln>
-          <a:effectLst/>
-        </p:spPr>
-        <p:style>
-          <a:lnRef idx="1">
-            <a:schemeClr val="accent1"/>
-          </a:lnRef>
-          <a:fillRef idx="3">
-            <a:schemeClr val="accent1"/>
-          </a:fillRef>
-          <a:effectRef idx="2">
-            <a:schemeClr val="accent1"/>
-          </a:effectRef>
-          <a:fontRef idx="minor">
-            <a:schemeClr val="lt1"/>
-          </a:fontRef>
-        </p:style>
-        <p:txBody>
-          <a:bodyPr rtlCol="0" anchor="ctr"/>
-          <a:lstStyle/>
-          <a:p>
-            <a:pPr algn="ctr"/>
-          </a:p>
-        </p:txBody>
-      </p:sp>
-      <p:sp>
-        <p:nvSpPr>
-          <p:cNvPr id="51" name="TextBox 50"/>
-          <p:cNvSpPr txBox="1"/>
-          <p:nvPr/>
-        </p:nvSpPr>
-        <p:spPr>
-          <a:xfrm>
-            <a:off x="6530187" y="3349244"/>
-            <a:ext cx="4936991" cy="294004"/>
-          </a:xfrm>
-          <a:prstGeom prst="rect">
-            <a:avLst/>
-          </a:prstGeom>
-          <a:noFill/>
-        </p:spPr>
-        <p:txBody>
-          <a:bodyPr wrap="square" lIns="0" rIns="0" tIns="0" bIns="0" anchor="t">
-            <a:spAutoFit/>
-          </a:bodyPr>
-          <a:lstStyle/>
-          <a:p>
-            <a:pPr algn="l">
-              <a:lnSpc>
-                <a:spcPts val="1954"/>
-              </a:lnSpc>
-            </a:pPr>
+            <a:br/>
             <a:r>
-              <a:rPr sz="1700" b="1">
-                <a:solidFill>
-                  <a:srgbClr val="1B2A4A"/>
-                </a:solidFill>
-                <a:latin typeface="Georgia"/>
-              </a:rPr>
-              <a:t>Ergonomika</a:t>
-            </a:r>
-          </a:p>
-        </p:txBody>
-      </p:sp>
-      <p:sp>
-        <p:nvSpPr>
-          <p:cNvPr id="52" name="TextBox 51"/>
-          <p:cNvSpPr txBox="1"/>
-          <p:nvPr/>
-        </p:nvSpPr>
-        <p:spPr>
-          <a:xfrm>
-            <a:off x="6530187" y="3688968"/>
-            <a:ext cx="4936991" cy="508000"/>
-          </a:xfrm>
-          <a:prstGeom prst="rect">
-            <a:avLst/>
-          </a:prstGeom>
-          <a:noFill/>
-        </p:spPr>
-        <p:txBody>
-          <a:bodyPr wrap="square" lIns="0" rIns="0" tIns="0" bIns="0" anchor="t">
-            <a:spAutoFit/>
-          </a:bodyPr>
-          <a:lstStyle/>
-          <a:p>
-            <a:pPr algn="l">
-              <a:lnSpc>
-                <a:spcPts val="1820"/>
-              </a:lnSpc>
-            </a:pPr>
-            <a:r>
-              <a:rPr sz="1400" b="0">
+              <a:rPr sz="1900" b="0">
                 <a:solidFill>
                   <a:srgbClr val="3A4560"/>
                 </a:solidFill>
                 <a:latin typeface="Segoe UI"/>
               </a:rPr>
-              <a:t>Ish joyi, jihoz va ish jarayonini inson tanasining anatomik va</a:t>
+              <a:t>moslashtiruvchi fan.</a:t>
             </a:r>
-            <a:br/>
-            <a:r>
-              <a:rPr sz="1400" b="0">
-                <a:solidFill>
-                  <a:srgbClr val="3A4560"/>
-                </a:solidFill>
-                <a:latin typeface="Segoe UI"/>
-              </a:rPr>
-              <a:t>fiziologik imkoniyatlariga moslashtiruvchi fan.</a:t>
-            </a:r>
-          </a:p>
-        </p:txBody>
-      </p:sp>
-      <p:sp>
-        <p:nvSpPr>
-          <p:cNvPr id="53" name="Rounded Rectangle 52"/>
+          </a:p>
+        </p:txBody>
+      </p:sp>
+      <p:sp>
+        <p:nvSpPr>
+          <p:cNvPr id="41" name="Rounded Rectangle 40"/>
           <p:cNvSpPr/>
           <p:nvPr/>
         </p:nvSpPr>
         <p:spPr>
           <a:xfrm>
-            <a:off x="731520" y="4724146"/>
-            <a:ext cx="5204307" cy="1310894"/>
+            <a:off x="731520" y="3954398"/>
+            <a:ext cx="10728655" cy="2080641"/>
           </a:xfrm>
           <a:prstGeom prst="roundRect">
             <a:avLst>
-              <a:gd name="adj" fmla="val 5580"/>
+              <a:gd name="adj" fmla="val 3515"/>
             </a:avLst>
           </a:prstGeom>
           <a:solidFill>
@@ -9363,14 +8833,14 @@
       </p:sp>
       <p:sp>
         <p:nvSpPr>
-          <p:cNvPr id="54" name="Rectangle 53"/>
+          <p:cNvPr id="42" name="Rectangle 41"/>
           <p:cNvSpPr/>
           <p:nvPr/>
         </p:nvSpPr>
         <p:spPr>
           <a:xfrm>
-            <a:off x="731520" y="4724146"/>
-            <a:ext cx="73152" cy="1310894"/>
+            <a:off x="731520" y="3954398"/>
+            <a:ext cx="73152" cy="2080641"/>
           </a:xfrm>
           <a:prstGeom prst="rect">
             <a:avLst/>
@@ -9407,14 +8877,14 @@
       </p:sp>
       <p:sp>
         <p:nvSpPr>
-          <p:cNvPr id="55" name="TextBox 54"/>
+          <p:cNvPr id="43" name="TextBox 42"/>
           <p:cNvSpPr txBox="1"/>
           <p:nvPr/>
         </p:nvSpPr>
         <p:spPr>
           <a:xfrm>
-            <a:off x="1005840" y="4888738"/>
-            <a:ext cx="4936991" cy="367029"/>
+            <a:off x="1005840" y="4118990"/>
+            <a:ext cx="10682313" cy="367029"/>
           </a:xfrm>
           <a:prstGeom prst="rect">
             <a:avLst/>
@@ -9446,14 +8916,14 @@
       </p:sp>
       <p:sp>
         <p:nvSpPr>
-          <p:cNvPr id="56" name="TextBox 55"/>
+          <p:cNvPr id="44" name="TextBox 43"/>
           <p:cNvSpPr txBox="1"/>
           <p:nvPr/>
         </p:nvSpPr>
         <p:spPr>
           <a:xfrm>
-            <a:off x="1005840" y="5301487"/>
-            <a:ext cx="4936991" cy="359410"/>
+            <a:off x="1005840" y="4531740"/>
+            <a:ext cx="10682313" cy="359410"/>
           </a:xfrm>
           <a:prstGeom prst="rect">
             <a:avLst/>
@@ -9479,186 +8949,6 @@
                 <a:latin typeface="Segoe UI"/>
               </a:rPr>
               <a:t>Organizmning ogohlantirish signali.</a:t>
-            </a:r>
-          </a:p>
-        </p:txBody>
-      </p:sp>
-      <p:sp>
-        <p:nvSpPr>
-          <p:cNvPr id="57" name="Rounded Rectangle 56"/>
-          <p:cNvSpPr/>
-          <p:nvPr/>
-        </p:nvSpPr>
-        <p:spPr>
-          <a:xfrm>
-            <a:off x="6255867" y="4724146"/>
-            <a:ext cx="5204307" cy="1310894"/>
-          </a:xfrm>
-          <a:prstGeom prst="roundRect">
-            <a:avLst>
-              <a:gd name="adj" fmla="val 5580"/>
-            </a:avLst>
-          </a:prstGeom>
-          <a:solidFill>
-            <a:srgbClr val="FBF6EC"/>
-          </a:solidFill>
-          <a:ln w="12700">
-            <a:solidFill>
-              <a:srgbClr val="D8C8AE"/>
-            </a:solidFill>
-          </a:ln>
-          <a:effectLst/>
-        </p:spPr>
-        <p:style>
-          <a:lnRef idx="1">
-            <a:schemeClr val="accent1"/>
-          </a:lnRef>
-          <a:fillRef idx="3">
-            <a:schemeClr val="accent1"/>
-          </a:fillRef>
-          <a:effectRef idx="2">
-            <a:schemeClr val="accent1"/>
-          </a:effectRef>
-          <a:fontRef idx="minor">
-            <a:schemeClr val="lt1"/>
-          </a:fontRef>
-        </p:style>
-        <p:txBody>
-          <a:bodyPr rtlCol="0" anchor="ctr"/>
-          <a:lstStyle/>
-          <a:p>
-            <a:pPr algn="ctr"/>
-          </a:p>
-        </p:txBody>
-      </p:sp>
-      <p:sp>
-        <p:nvSpPr>
-          <p:cNvPr id="58" name="Rectangle 57"/>
-          <p:cNvSpPr/>
-          <p:nvPr/>
-        </p:nvSpPr>
-        <p:spPr>
-          <a:xfrm>
-            <a:off x="6255867" y="4724146"/>
-            <a:ext cx="73152" cy="1310894"/>
-          </a:xfrm>
-          <a:prstGeom prst="rect">
-            <a:avLst/>
-          </a:prstGeom>
-          <a:solidFill>
-            <a:srgbClr val="0E7C7B"/>
-          </a:solidFill>
-          <a:ln>
-            <a:noFill/>
-          </a:ln>
-          <a:effectLst/>
-        </p:spPr>
-        <p:style>
-          <a:lnRef idx="1">
-            <a:schemeClr val="accent1"/>
-          </a:lnRef>
-          <a:fillRef idx="3">
-            <a:schemeClr val="accent1"/>
-          </a:fillRef>
-          <a:effectRef idx="2">
-            <a:schemeClr val="accent1"/>
-          </a:effectRef>
-          <a:fontRef idx="minor">
-            <a:schemeClr val="lt1"/>
-          </a:fontRef>
-        </p:style>
-        <p:txBody>
-          <a:bodyPr rtlCol="0" anchor="ctr"/>
-          <a:lstStyle/>
-          <a:p>
-            <a:pPr algn="ctr"/>
-          </a:p>
-        </p:txBody>
-      </p:sp>
-      <p:sp>
-        <p:nvSpPr>
-          <p:cNvPr id="59" name="TextBox 58"/>
-          <p:cNvSpPr txBox="1"/>
-          <p:nvPr/>
-        </p:nvSpPr>
-        <p:spPr>
-          <a:xfrm>
-            <a:off x="6530187" y="4888738"/>
-            <a:ext cx="4936991" cy="337819"/>
-          </a:xfrm>
-          <a:prstGeom prst="rect">
-            <a:avLst/>
-          </a:prstGeom>
-          <a:noFill/>
-        </p:spPr>
-        <p:txBody>
-          <a:bodyPr wrap="square" lIns="0" rIns="0" tIns="0" bIns="0" anchor="t">
-            <a:spAutoFit/>
-          </a:bodyPr>
-          <a:lstStyle/>
-          <a:p>
-            <a:pPr algn="l">
-              <a:lnSpc>
-                <a:spcPts val="2300"/>
-              </a:lnSpc>
-            </a:pPr>
-            <a:r>
-              <a:rPr sz="2000" b="1">
-                <a:solidFill>
-                  <a:srgbClr val="1B2A4A"/>
-                </a:solidFill>
-                <a:latin typeface="Georgia"/>
-              </a:rPr>
-              <a:t>Stul balandligi</a:t>
-            </a:r>
-          </a:p>
-        </p:txBody>
-      </p:sp>
-      <p:sp>
-        <p:nvSpPr>
-          <p:cNvPr id="60" name="TextBox 59"/>
-          <p:cNvSpPr txBox="1"/>
-          <p:nvPr/>
-        </p:nvSpPr>
-        <p:spPr>
-          <a:xfrm>
-            <a:off x="6530187" y="5272278"/>
-            <a:ext cx="4936991" cy="607060"/>
-          </a:xfrm>
-          <a:prstGeom prst="rect">
-            <a:avLst/>
-          </a:prstGeom>
-          <a:noFill/>
-        </p:spPr>
-        <p:txBody>
-          <a:bodyPr wrap="square" lIns="0" rIns="0" tIns="0" bIns="0" anchor="t">
-            <a:spAutoFit/>
-          </a:bodyPr>
-          <a:lstStyle/>
-          <a:p>
-            <a:pPr algn="l">
-              <a:lnSpc>
-                <a:spcPts val="2210"/>
-              </a:lnSpc>
-            </a:pPr>
-            <a:r>
-              <a:rPr sz="1700" b="0">
-                <a:solidFill>
-                  <a:srgbClr val="3A4560"/>
-                </a:solidFill>
-                <a:latin typeface="Segoe UI"/>
-              </a:rPr>
-              <a:t>Oyoq panjalari polga to‘liq tegib turishi, tizzalar</a:t>
-            </a:r>
-            <a:br/>
-            <a:r>
-              <a:rPr sz="1700" b="0">
-                <a:solidFill>
-                  <a:srgbClr val="3A4560"/>
-                </a:solidFill>
-                <a:latin typeface="Segoe UI"/>
-              </a:rPr>
-              <a:t>taxminan 90° burchak hosil qilishi kerak.</a:t>
             </a:r>
           </a:p>
         </p:txBody>
